--- a/exports/pptx/lessons/senior-module-03-ayurveda-good-health/day-07-integration-debate.pptx
+++ b/exports/pptx/lessons/senior-module-03-ayurveda-good-health/day-07-integration-debate.pptx
@@ -3201,6 +3201,208 @@
         </p:nvSpPr>
         <p:spPr>
           <a:xfrm>
+            <a:off x="406301" y="870942"/>
+            <a:ext cx="8498026" cy="213271"/>
+          </a:xfrm>
+          <a:prstGeom prst="rect">
+            <a:avLst/>
+          </a:prstGeom>
+          <a:noFill/>
+          <a:ln/>
+        </p:spPr>
+        <p:txBody>
+          <a:bodyPr wrap="square" lIns="0" tIns="0" rIns="0" bIns="0" rtlCol="0" anchor="t"/>
+          <a:lstStyle/>
+          <a:p>
+            <a:pPr algn="l" indent="0" marL="0">
+              <a:lnSpc>
+                <a:spcPts val="1680"/>
+              </a:lnSpc>
+              <a:spcBef>
+                <a:spcPts val="300"/>
+              </a:spcBef>
+              <a:spcAft>
+                <a:spcPts val="300"/>
+              </a:spcAft>
+              <a:buNone/>
+            </a:pPr>
+            <a:r>
+              <a:rPr lang="en-US" sz="1200" i="1" dirty="0">
+                <a:solidFill>
+                  <a:srgbClr val="1A1A1A"/>
+                </a:solidFill>
+                <a:latin typeface="Georgia" pitchFamily="34" charset="0"/>
+                <a:ea typeface="Georgia" pitchFamily="34" charset="-122"/>
+                <a:cs typeface="Georgia" pitchFamily="34" charset="-120"/>
+              </a:rPr>
+              <a:t>Each row: Position · One-line · Defenders.</a:t>
+            </a:r>
+            <a:endParaRPr lang="en-US" sz="1200" dirty="0"/>
+          </a:p>
+        </p:txBody>
+      </p:sp>
+      <p:sp>
+        <p:nvSpPr>
+          <p:cNvPr id="5" name="Text 3"/>
+          <p:cNvSpPr/>
+          <p:nvPr/>
+        </p:nvSpPr>
+        <p:spPr>
+          <a:xfrm>
+            <a:off x="634901" y="1173063"/>
+            <a:ext cx="8102798" cy="1386483"/>
+          </a:xfrm>
+          <a:prstGeom prst="rect">
+            <a:avLst/>
+          </a:prstGeom>
+          <a:noFill/>
+          <a:ln/>
+        </p:spPr>
+        <p:txBody>
+          <a:bodyPr wrap="square" lIns="0" tIns="0" rIns="0" bIns="0" rtlCol="0" anchor="t"/>
+          <a:lstStyle/>
+          <a:p>
+            <a:pPr algn="l" marL="342900" indent="-342900">
+              <a:lnSpc>
+                <a:spcPts val="1620"/>
+              </a:lnSpc>
+              <a:spcAft>
+                <a:spcPts val="300"/>
+              </a:spcAft>
+              <a:buSzPct val="100000"/>
+              <a:buChar char="•"/>
+            </a:pPr>
+            <a:r>
+              <a:rPr lang="en-US" sz="1200" b="1" dirty="0">
+                <a:solidFill>
+                  <a:srgbClr val="1A1A1A"/>
+                </a:solidFill>
+                <a:latin typeface="Georgia" pitchFamily="34" charset="0"/>
+                <a:ea typeface="Georgia" pitchFamily="34" charset="-122"/>
+                <a:cs typeface="Georgia" pitchFamily="34" charset="-120"/>
+              </a:rPr>
+              <a:t>A — Full integration</a:t>
+            </a:r>
+            <a:pPr algn="l" indent="0" marL="0">
+              <a:lnSpc>
+                <a:spcPts val="1620"/>
+              </a:lnSpc>
+              <a:spcAft>
+                <a:spcPts val="300"/>
+              </a:spcAft>
+              <a:buNone/>
+            </a:pPr>
+            <a:r>
+              <a:rPr lang="en-US" sz="1200" dirty="0">
+                <a:solidFill>
+                  <a:srgbClr val="1A1A1A"/>
+                </a:solidFill>
+                <a:latin typeface="Georgia" pitchFamily="34" charset="0"/>
+                <a:ea typeface="Georgia" pitchFamily="34" charset="-122"/>
+                <a:cs typeface="Georgia" pitchFamily="34" charset="-120"/>
+              </a:rPr>
+              <a:t> — Ayurveda alongside biomedicine; AYUSH practitioners can offer first-line care · AYUSH Ministry; many Indian Ayurveda practitioners</a:t>
+            </a:r>
+            <a:endParaRPr lang="en-US" sz="1200" dirty="0"/>
+          </a:p>
+          <a:p>
+            <a:pPr algn="l" marL="342900" indent="-342900">
+              <a:lnSpc>
+                <a:spcPts val="1620"/>
+              </a:lnSpc>
+              <a:spcAft>
+                <a:spcPts val="300"/>
+              </a:spcAft>
+              <a:buSzPct val="100000"/>
+              <a:buChar char="•"/>
+            </a:pPr>
+            <a:r>
+              <a:rPr lang="en-US" sz="1200" b="1" dirty="0">
+                <a:solidFill>
+                  <a:srgbClr val="1A1A1A"/>
+                </a:solidFill>
+                <a:latin typeface="Georgia" pitchFamily="34" charset="0"/>
+                <a:ea typeface="Georgia" pitchFamily="34" charset="-122"/>
+                <a:cs typeface="Georgia" pitchFamily="34" charset="-120"/>
+              </a:rPr>
+              <a:t>B — Selective integration</a:t>
+            </a:r>
+            <a:pPr algn="l" indent="0" marL="0">
+              <a:lnSpc>
+                <a:spcPts val="1620"/>
+              </a:lnSpc>
+              <a:spcAft>
+                <a:spcPts val="300"/>
+              </a:spcAft>
+              <a:buNone/>
+            </a:pPr>
+            <a:r>
+              <a:rPr lang="en-US" sz="1200" dirty="0">
+                <a:solidFill>
+                  <a:srgbClr val="1A1A1A"/>
+                </a:solidFill>
+                <a:latin typeface="Georgia" pitchFamily="34" charset="0"/>
+                <a:ea typeface="Georgia" pitchFamily="34" charset="-122"/>
+                <a:cs typeface="Georgia" pitchFamily="34" charset="-120"/>
+              </a:rPr>
+              <a:t> — Use Ayurveda where evidence supports; biomedicine where it leads · Patwardhan et al. (2015); evidence-based traditional medicine movement</a:t>
+            </a:r>
+            <a:endParaRPr lang="en-US" sz="1200" dirty="0"/>
+          </a:p>
+          <a:p>
+            <a:pPr algn="l" marL="342900" indent="-342900">
+              <a:lnSpc>
+                <a:spcPts val="1620"/>
+              </a:lnSpc>
+              <a:spcAft>
+                <a:spcPts val="300"/>
+              </a:spcAft>
+              <a:buSzPct val="100000"/>
+              <a:buChar char="•"/>
+            </a:pPr>
+            <a:r>
+              <a:rPr lang="en-US" sz="1200" b="1" dirty="0">
+                <a:solidFill>
+                  <a:srgbClr val="1A1A1A"/>
+                </a:solidFill>
+                <a:latin typeface="Georgia" pitchFamily="34" charset="0"/>
+                <a:ea typeface="Georgia" pitchFamily="34" charset="-122"/>
+                <a:cs typeface="Georgia" pitchFamily="34" charset="-120"/>
+              </a:rPr>
+              <a:t>C — Separation</a:t>
+            </a:r>
+            <a:pPr algn="l" indent="0" marL="0">
+              <a:lnSpc>
+                <a:spcPts val="1620"/>
+              </a:lnSpc>
+              <a:spcAft>
+                <a:spcPts val="300"/>
+              </a:spcAft>
+              <a:buNone/>
+            </a:pPr>
+            <a:r>
+              <a:rPr lang="en-US" sz="1200" dirty="0">
+                <a:solidFill>
+                  <a:srgbClr val="1A1A1A"/>
+                </a:solidFill>
+                <a:latin typeface="Georgia" pitchFamily="34" charset="0"/>
+                <a:ea typeface="Georgia" pitchFamily="34" charset="-122"/>
+                <a:cs typeface="Georgia" pitchFamily="34" charset="-120"/>
+              </a:rPr>
+              <a:t> — Ayurveda as cultural-historical study; biomedicine for actual treatment · Indian Medical Association (some positions); skeptical scientists</a:t>
+            </a:r>
+            <a:endParaRPr lang="en-US" sz="1200" dirty="0"/>
+          </a:p>
+        </p:txBody>
+      </p:sp>
+      <p:sp>
+        <p:nvSpPr>
+          <p:cNvPr id="6" name="Text 4"/>
+          <p:cNvSpPr/>
+          <p:nvPr/>
+        </p:nvSpPr>
+        <p:spPr>
+          <a:xfrm>
             <a:off x="406301" y="4434929"/>
             <a:ext cx="8498026" cy="213271"/>
           </a:xfrm>

--- a/exports/pptx/lessons/senior-module-03-ayurveda-good-health/day-07-integration-debate.pptx
+++ b/exports/pptx/lessons/senior-module-03-ayurveda-good-health/day-07-integration-debate.pptx
@@ -16,9 +16,11 @@
     <p:sldId id="264" r:id="rId10"/>
     <p:sldId id="265" r:id="rId11"/>
     <p:sldId id="266" r:id="rId12"/>
+    <p:sldId id="267" r:id="rId13"/>
+    <p:sldId id="268" r:id="rId14"/>
   </p:sldIdLst>
   <p:notesMasterIdLst>
-    <p:notesMasterId r:id="rId13"/>
+    <p:notesMasterId r:id="rId15"/>
   </p:notesMasterIdLst>
   <p:sldSz cx="9144000" cy="5143500"/>
   <p:notesSz cx="5143500" cy="9144000"/>
@@ -712,6 +714,182 @@
             <a:fld id="{F7021451-1387-4CA6-816F-3879F97B5CBC}" type="slidenum">
               <a:rPr lang="en-US"/>
               <a:t>11</a:t>
+            </a:fld>
+            <a:endParaRPr lang="en-US"/>
+          </a:p>
+        </p:txBody>
+      </p:sp>
+    </p:spTree>
+    <p:extLst>
+      <p:ext uri="{BB962C8B-B14F-4D97-AF65-F5344CB8AC3E}">
+        <p14:creationId xmlns:p14="http://schemas.microsoft.com/office/powerpoint/2010/main" val="1024086991"/>
+      </p:ext>
+    </p:extLst>
+  </p:cSld>
+  <p:clrMapOvr>
+    <a:masterClrMapping/>
+  </p:clrMapOvr>
+</p:notes>
+</file>
+
+<file path=ppt/notesSlides/notesSlide12.xml><?xml version="1.0" encoding="utf-8"?>
+<p:notes xmlns:a="http://schemas.openxmlformats.org/drawingml/2006/main" xmlns:r="http://schemas.openxmlformats.org/officeDocument/2006/relationships" xmlns:p="http://schemas.openxmlformats.org/presentationml/2006/main">
+  <p:cSld>
+    <p:spTree>
+      <p:nvGrpSpPr>
+        <p:cNvPr id="1" name=""/>
+        <p:cNvGrpSpPr/>
+        <p:nvPr/>
+      </p:nvGrpSpPr>
+      <p:grpSpPr>
+        <a:xfrm>
+          <a:off x="0" y="0"/>
+          <a:ext cx="0" cy="0"/>
+          <a:chOff x="0" y="0"/>
+          <a:chExt cx="0" cy="0"/>
+        </a:xfrm>
+      </p:grpSpPr>
+      <p:sp>
+        <p:nvSpPr>
+          <p:cNvPr id="2" name="Slide Image Placeholder 1"/>
+          <p:cNvSpPr>
+            <a:spLocks noGrp="1" noRot="1" noChangeAspect="1"/>
+          </p:cNvSpPr>
+          <p:nvPr>
+            <p:ph type="sldImg"/>
+          </p:nvPr>
+        </p:nvSpPr>
+        <p:spPr/>
+      </p:sp>
+      <p:sp>
+        <p:nvSpPr>
+          <p:cNvPr id="3" name="Notes Placeholder 2"/>
+          <p:cNvSpPr>
+            <a:spLocks noGrp="1"/>
+          </p:cNvSpPr>
+          <p:nvPr>
+            <p:ph type="body" idx="1"/>
+          </p:nvPr>
+        </p:nvSpPr>
+        <p:spPr/>
+        <p:txBody>
+          <a:bodyPr/>
+          <a:lstStyle/>
+          <a:p>
+            <a:r>
+              <a:rPr lang="en-US" dirty="0"/>
+              <a:t/>
+            </a:r>
+            <a:endParaRPr lang="en-US" dirty="0"/>
+          </a:p>
+        </p:txBody>
+      </p:sp>
+      <p:sp>
+        <p:nvSpPr>
+          <p:cNvPr id="4" name="Slide Number Placeholder 3"/>
+          <p:cNvSpPr>
+            <a:spLocks noGrp="1"/>
+          </p:cNvSpPr>
+          <p:nvPr>
+            <p:ph type="sldNum" sz="quarter" idx="10"/>
+          </p:nvPr>
+        </p:nvSpPr>
+        <p:spPr/>
+        <p:txBody>
+          <a:bodyPr/>
+          <a:lstStyle/>
+          <a:p>
+            <a:fld id="{F7021451-1387-4CA6-816F-3879F97B5CBC}" type="slidenum">
+              <a:rPr lang="en-US"/>
+              <a:t>12</a:t>
+            </a:fld>
+            <a:endParaRPr lang="en-US"/>
+          </a:p>
+        </p:txBody>
+      </p:sp>
+    </p:spTree>
+    <p:extLst>
+      <p:ext uri="{BB962C8B-B14F-4D97-AF65-F5344CB8AC3E}">
+        <p14:creationId xmlns:p14="http://schemas.microsoft.com/office/powerpoint/2010/main" val="1024086991"/>
+      </p:ext>
+    </p:extLst>
+  </p:cSld>
+  <p:clrMapOvr>
+    <a:masterClrMapping/>
+  </p:clrMapOvr>
+</p:notes>
+</file>
+
+<file path=ppt/notesSlides/notesSlide13.xml><?xml version="1.0" encoding="utf-8"?>
+<p:notes xmlns:a="http://schemas.openxmlformats.org/drawingml/2006/main" xmlns:r="http://schemas.openxmlformats.org/officeDocument/2006/relationships" xmlns:p="http://schemas.openxmlformats.org/presentationml/2006/main">
+  <p:cSld>
+    <p:spTree>
+      <p:nvGrpSpPr>
+        <p:cNvPr id="1" name=""/>
+        <p:cNvGrpSpPr/>
+        <p:nvPr/>
+      </p:nvGrpSpPr>
+      <p:grpSpPr>
+        <a:xfrm>
+          <a:off x="0" y="0"/>
+          <a:ext cx="0" cy="0"/>
+          <a:chOff x="0" y="0"/>
+          <a:chExt cx="0" cy="0"/>
+        </a:xfrm>
+      </p:grpSpPr>
+      <p:sp>
+        <p:nvSpPr>
+          <p:cNvPr id="2" name="Slide Image Placeholder 1"/>
+          <p:cNvSpPr>
+            <a:spLocks noGrp="1" noRot="1" noChangeAspect="1"/>
+          </p:cNvSpPr>
+          <p:nvPr>
+            <p:ph type="sldImg"/>
+          </p:nvPr>
+        </p:nvSpPr>
+        <p:spPr/>
+      </p:sp>
+      <p:sp>
+        <p:nvSpPr>
+          <p:cNvPr id="3" name="Notes Placeholder 2"/>
+          <p:cNvSpPr>
+            <a:spLocks noGrp="1"/>
+          </p:cNvSpPr>
+          <p:nvPr>
+            <p:ph type="body" idx="1"/>
+          </p:nvPr>
+        </p:nvSpPr>
+        <p:spPr/>
+        <p:txBody>
+          <a:bodyPr/>
+          <a:lstStyle/>
+          <a:p>
+            <a:r>
+              <a:rPr lang="en-US" dirty="0"/>
+              <a:t/>
+            </a:r>
+            <a:endParaRPr lang="en-US" dirty="0"/>
+          </a:p>
+        </p:txBody>
+      </p:sp>
+      <p:sp>
+        <p:nvSpPr>
+          <p:cNvPr id="4" name="Slide Number Placeholder 3"/>
+          <p:cNvSpPr>
+            <a:spLocks noGrp="1"/>
+          </p:cNvSpPr>
+          <p:nvPr>
+            <p:ph type="sldNum" sz="quarter" idx="10"/>
+          </p:nvPr>
+        </p:nvSpPr>
+        <p:spPr/>
+        <p:txBody>
+          <a:bodyPr/>
+          <a:lstStyle/>
+          <a:p>
+            <a:fld id="{F7021451-1387-4CA6-816F-3879F97B5CBC}" type="slidenum">
+              <a:rPr lang="en-US"/>
+              <a:t>13</a:t>
             </a:fld>
             <a:endParaRPr lang="en-US"/>
           </a:p>
@@ -1965,102 +2143,6 @@
         </p:nvSpPr>
         <p:spPr>
           <a:xfrm>
-            <a:off x="406301" y="1223963"/>
-            <a:ext cx="8498026" cy="274290"/>
-          </a:xfrm>
-          <a:prstGeom prst="rect">
-            <a:avLst/>
-          </a:prstGeom>
-          <a:noFill/>
-          <a:ln/>
-        </p:spPr>
-        <p:txBody>
-          <a:bodyPr wrap="square" lIns="0" tIns="0" rIns="0" bIns="0" rtlCol="0" anchor="t"/>
-          <a:lstStyle/>
-          <a:p>
-            <a:pPr algn="l" indent="0" marL="0">
-              <a:lnSpc>
-                <a:spcPts val="2160"/>
-              </a:lnSpc>
-              <a:spcBef>
-                <a:spcPts val="600"/>
-              </a:spcBef>
-              <a:spcAft>
-                <a:spcPts val="800"/>
-              </a:spcAft>
-              <a:buNone/>
-            </a:pPr>
-            <a:r>
-              <a:rPr lang="en-US" sz="1800" b="1" dirty="0">
-                <a:solidFill>
-                  <a:srgbClr val="997929"/>
-                </a:solidFill>
-                <a:latin typeface="Times New Roman" pitchFamily="34" charset="0"/>
-                <a:ea typeface="Times New Roman" pitchFamily="34" charset="-122"/>
-                <a:cs typeface="Times New Roman" pitchFamily="34" charset="-120"/>
-              </a:rPr>
-              <a:t>Learning objective</a:t>
-            </a:r>
-            <a:endParaRPr lang="en-US" sz="1800" dirty="0"/>
-          </a:p>
-        </p:txBody>
-      </p:sp>
-      <p:sp>
-        <p:nvSpPr>
-          <p:cNvPr id="6" name="Text 4"/>
-          <p:cNvSpPr/>
-          <p:nvPr/>
-        </p:nvSpPr>
-        <p:spPr>
-          <a:xfrm>
-            <a:off x="406301" y="1637854"/>
-            <a:ext cx="8498026" cy="426541"/>
-          </a:xfrm>
-          <a:prstGeom prst="rect">
-            <a:avLst/>
-          </a:prstGeom>
-          <a:noFill/>
-          <a:ln/>
-        </p:spPr>
-        <p:txBody>
-          <a:bodyPr wrap="square" lIns="0" tIns="0" rIns="0" bIns="0" rtlCol="0" anchor="t"/>
-          <a:lstStyle/>
-          <a:p>
-            <a:pPr algn="l" indent="0" marL="0">
-              <a:lnSpc>
-                <a:spcPts val="1680"/>
-              </a:lnSpc>
-              <a:spcBef>
-                <a:spcPts val="300"/>
-              </a:spcBef>
-              <a:spcAft>
-                <a:spcPts val="300"/>
-              </a:spcAft>
-              <a:buNone/>
-            </a:pPr>
-            <a:r>
-              <a:rPr lang="en-US" sz="1200" dirty="0">
-                <a:solidFill>
-                  <a:srgbClr val="1A1A1A"/>
-                </a:solidFill>
-                <a:latin typeface="Georgia" pitchFamily="34" charset="0"/>
-                <a:ea typeface="Georgia" pitchFamily="34" charset="-122"/>
-                <a:cs typeface="Georgia" pitchFamily="34" charset="-120"/>
-              </a:rPr>
-              <a:t>Students articulate three positions on integrating Ayurveda into modern healthcare and defend one with steel-manned counter-arguments.</a:t>
-            </a:r>
-            <a:endParaRPr lang="en-US" sz="1200" dirty="0"/>
-          </a:p>
-        </p:txBody>
-      </p:sp>
-      <p:sp>
-        <p:nvSpPr>
-          <p:cNvPr id="7" name="Text 5"/>
-          <p:cNvSpPr/>
-          <p:nvPr/>
-        </p:nvSpPr>
-        <p:spPr>
-          <a:xfrm>
             <a:off x="406301" y="4434929"/>
             <a:ext cx="8498026" cy="213271"/>
           </a:xfrm>
@@ -2205,7 +2287,7 @@
                 <a:ea typeface="Times New Roman" pitchFamily="34" charset="-122"/>
                 <a:cs typeface="Times New Roman" pitchFamily="34" charset="-120"/>
               </a:rPr>
-              <a:t>Teacher notes</a:t>
+              <a:t>Wrap-up (12 min)</a:t>
             </a:r>
             <a:endParaRPr lang="en-US" sz="1800" dirty="0"/>
           </a:p>
@@ -2219,8 +2301,8 @@
         </p:nvSpPr>
         <p:spPr>
           <a:xfrm>
-            <a:off x="406301" y="870942"/>
-            <a:ext cx="8498026" cy="426541"/>
+            <a:off x="634901" y="883593"/>
+            <a:ext cx="8102798" cy="731341"/>
           </a:xfrm>
           <a:prstGeom prst="rect">
             <a:avLst/>
@@ -2232,17 +2314,15 @@
           <a:bodyPr wrap="square" lIns="0" tIns="0" rIns="0" bIns="0" rtlCol="0" anchor="t"/>
           <a:lstStyle/>
           <a:p>
-            <a:pPr algn="l" indent="0" marL="0">
-              <a:lnSpc>
-                <a:spcPts val="1680"/>
-              </a:lnSpc>
-              <a:spcBef>
-                <a:spcPts val="300"/>
-              </a:spcBef>
-              <a:spcAft>
-                <a:spcPts val="300"/>
-              </a:spcAft>
-              <a:buNone/>
+            <a:pPr algn="l" marL="342900" indent="-342900">
+              <a:lnSpc>
+                <a:spcPts val="1620"/>
+              </a:lnSpc>
+              <a:spcAft>
+                <a:spcPts val="300"/>
+              </a:spcAft>
+              <a:buSzPct val="100000"/>
+              <a:buChar char="•"/>
             </a:pPr>
             <a:r>
               <a:rPr lang="en-US" sz="1200" dirty="0">
@@ -2253,7 +2333,51 @@
                 <a:ea typeface="Georgia" pitchFamily="34" charset="-122"/>
                 <a:cs typeface="Georgia" pitchFamily="34" charset="-120"/>
               </a:rPr>
-              <a:t>– AYUSH ministry is real, contemporary, politically significant. Honour the political reality. – Some students from medical families have strong priors. Help them articulate their position rigorously.</a:t>
+              <a:t>3 students share if their view shifted.</a:t>
+            </a:r>
+            <a:endParaRPr lang="en-US" sz="1200" dirty="0"/>
+          </a:p>
+          <a:p>
+            <a:pPr algn="l" marL="342900" indent="-342900">
+              <a:lnSpc>
+                <a:spcPts val="1620"/>
+              </a:lnSpc>
+              <a:spcAft>
+                <a:spcPts val="300"/>
+              </a:spcAft>
+              <a:buSzPct val="100000"/>
+              <a:buChar char="•"/>
+            </a:pPr>
+            <a:r>
+              <a:rPr lang="en-US" sz="1200" dirty="0">
+                <a:solidFill>
+                  <a:srgbClr val="1A1A1A"/>
+                </a:solidFill>
+                <a:latin typeface="Georgia" pitchFamily="34" charset="0"/>
+                <a:ea typeface="Georgia" pitchFamily="34" charset="-122"/>
+                <a:cs typeface="Georgia" pitchFamily="34" charset="-120"/>
+              </a:rPr>
+              <a:t>Note: </a:t>
+            </a:r>
+            <a:pPr algn="l" indent="0" marL="0">
+              <a:lnSpc>
+                <a:spcPts val="1620"/>
+              </a:lnSpc>
+              <a:spcAft>
+                <a:spcPts val="300"/>
+              </a:spcAft>
+              <a:buNone/>
+            </a:pPr>
+            <a:r>
+              <a:rPr lang="en-US" sz="1200" i="1" dirty="0">
+                <a:solidFill>
+                  <a:srgbClr val="1A1A1A"/>
+                </a:solidFill>
+                <a:latin typeface="Georgia" pitchFamily="34" charset="0"/>
+                <a:ea typeface="Georgia" pitchFamily="34" charset="-122"/>
+                <a:cs typeface="Georgia" pitchFamily="34" charset="-120"/>
+              </a:rPr>
+              <a:t>"This is the most politically loaded session. Both extreme positions have problems. The mature position is somewhere in the middle, defended with evidence."</a:t>
             </a:r>
             <a:endParaRPr lang="en-US" sz="1200" dirty="0"/>
           </a:p>
@@ -2411,7 +2535,7 @@
                 <a:ea typeface="Times New Roman" pitchFamily="34" charset="-122"/>
                 <a:cs typeface="Times New Roman" pitchFamily="34" charset="-120"/>
               </a:rPr>
-              <a:t>Citation(s) used</a:t>
+              <a:t>Differentiation</a:t>
             </a:r>
             <a:endParaRPr lang="en-US" sz="1800" dirty="0"/>
           </a:p>
@@ -2425,8 +2549,8 @@
         </p:nvSpPr>
         <p:spPr>
           <a:xfrm>
-            <a:off x="406301" y="870942"/>
-            <a:ext cx="8498026" cy="213271"/>
+            <a:off x="634901" y="883593"/>
+            <a:ext cx="8102798" cy="525661"/>
           </a:xfrm>
           <a:prstGeom prst="rect">
             <a:avLst/>
@@ -2438,20 +2562,18 @@
           <a:bodyPr wrap="square" lIns="0" tIns="0" rIns="0" bIns="0" rtlCol="0" anchor="t"/>
           <a:lstStyle/>
           <a:p>
-            <a:pPr algn="l" indent="0" marL="0">
-              <a:lnSpc>
-                <a:spcPts val="1680"/>
-              </a:lnSpc>
-              <a:spcBef>
-                <a:spcPts val="300"/>
-              </a:spcBef>
-              <a:spcAft>
-                <a:spcPts val="300"/>
-              </a:spcAft>
-              <a:buNone/>
-            </a:pPr>
-            <a:r>
-              <a:rPr lang="en-US" sz="1200" dirty="0">
+            <a:pPr algn="l" marL="342900" indent="-342900">
+              <a:lnSpc>
+                <a:spcPts val="1620"/>
+              </a:lnSpc>
+              <a:spcAft>
+                <a:spcPts val="300"/>
+              </a:spcAft>
+              <a:buSzPct val="100000"/>
+              <a:buChar char="•"/>
+            </a:pPr>
+            <a:r>
+              <a:rPr lang="en-US" sz="1200" b="1" dirty="0">
                 <a:solidFill>
                   <a:srgbClr val="1A1A1A"/>
                 </a:solidFill>
@@ -2459,7 +2581,551 @@
                 <a:ea typeface="Georgia" pitchFamily="34" charset="-122"/>
                 <a:cs typeface="Georgia" pitchFamily="34" charset="-120"/>
               </a:rPr>
-              <a:t>– AYUSH Ministry policy documents. – Patwardhan et al. (2015). – Various IMA statements.</a:t>
+              <a:t>Tier up:</a:t>
+            </a:r>
+            <a:pPr algn="l" indent="0" marL="0">
+              <a:lnSpc>
+                <a:spcPts val="1620"/>
+              </a:lnSpc>
+              <a:spcAft>
+                <a:spcPts val="300"/>
+              </a:spcAft>
+              <a:buNone/>
+            </a:pPr>
+            <a:r>
+              <a:rPr lang="en-US" sz="1200" dirty="0">
+                <a:solidFill>
+                  <a:srgbClr val="1A1A1A"/>
+                </a:solidFill>
+                <a:latin typeface="Georgia" pitchFamily="34" charset="0"/>
+                <a:ea typeface="Georgia" pitchFamily="34" charset="-122"/>
+                <a:cs typeface="Georgia" pitchFamily="34" charset="-120"/>
+              </a:rPr>
+              <a:t> Take position you disagree with.</a:t>
+            </a:r>
+            <a:endParaRPr lang="en-US" sz="1200" dirty="0"/>
+          </a:p>
+          <a:p>
+            <a:pPr algn="l" marL="342900" indent="-342900">
+              <a:lnSpc>
+                <a:spcPts val="1620"/>
+              </a:lnSpc>
+              <a:spcAft>
+                <a:spcPts val="300"/>
+              </a:spcAft>
+              <a:buSzPct val="100000"/>
+              <a:buChar char="•"/>
+            </a:pPr>
+            <a:r>
+              <a:rPr lang="en-US" sz="1200" b="1" dirty="0">
+                <a:solidFill>
+                  <a:srgbClr val="1A1A1A"/>
+                </a:solidFill>
+                <a:latin typeface="Georgia" pitchFamily="34" charset="0"/>
+                <a:ea typeface="Georgia" pitchFamily="34" charset="-122"/>
+                <a:cs typeface="Georgia" pitchFamily="34" charset="-120"/>
+              </a:rPr>
+              <a:t>Tier down:</a:t>
+            </a:r>
+            <a:pPr algn="l" indent="0" marL="0">
+              <a:lnSpc>
+                <a:spcPts val="1620"/>
+              </a:lnSpc>
+              <a:spcAft>
+                <a:spcPts val="300"/>
+              </a:spcAft>
+              <a:buNone/>
+            </a:pPr>
+            <a:r>
+              <a:rPr lang="en-US" sz="1200" dirty="0">
+                <a:solidFill>
+                  <a:srgbClr val="1A1A1A"/>
+                </a:solidFill>
+                <a:latin typeface="Georgia" pitchFamily="34" charset="0"/>
+                <a:ea typeface="Georgia" pitchFamily="34" charset="-122"/>
+                <a:cs typeface="Georgia" pitchFamily="34" charset="-120"/>
+              </a:rPr>
+              <a:t> Use prepared 2-min argument.</a:t>
+            </a:r>
+            <a:endParaRPr lang="en-US" sz="1200" dirty="0"/>
+          </a:p>
+        </p:txBody>
+      </p:sp>
+      <p:sp>
+        <p:nvSpPr>
+          <p:cNvPr id="5" name="Text 3"/>
+          <p:cNvSpPr/>
+          <p:nvPr/>
+        </p:nvSpPr>
+        <p:spPr>
+          <a:xfrm>
+            <a:off x="406301" y="4434929"/>
+            <a:ext cx="8498026" cy="213271"/>
+          </a:xfrm>
+          <a:prstGeom prst="rect">
+            <a:avLst/>
+          </a:prstGeom>
+          <a:noFill/>
+          <a:ln/>
+        </p:spPr>
+        <p:txBody>
+          <a:bodyPr wrap="square" lIns="0" tIns="0" rIns="0" bIns="0" rtlCol="0" anchor="t"/>
+          <a:lstStyle/>
+          <a:p>
+            <a:pPr algn="l" indent="0" marL="0">
+              <a:lnSpc>
+                <a:spcPts val="1680"/>
+              </a:lnSpc>
+              <a:spcBef>
+                <a:spcPts val="300"/>
+              </a:spcBef>
+              <a:spcAft>
+                <a:spcPts val="300"/>
+              </a:spcAft>
+              <a:buNone/>
+            </a:pPr>
+            <a:r>
+              <a:rPr lang="en-US" sz="1200" dirty="0">
+                <a:solidFill>
+                  <a:srgbClr val="1A1A1A"/>
+                </a:solidFill>
+                <a:latin typeface="Georgia" pitchFamily="34" charset="0"/>
+                <a:ea typeface="Georgia" pitchFamily="34" charset="-122"/>
+                <a:cs typeface="Georgia" pitchFamily="34" charset="-120"/>
+              </a:rPr>
+              <a:t>Senior ·  · IKS Curriculum</a:t>
+            </a:r>
+            <a:endParaRPr lang="en-US" sz="1200" dirty="0"/>
+          </a:p>
+        </p:txBody>
+      </p:sp>
+    </p:spTree>
+  </p:cSld>
+  <p:clrMapOvr>
+    <a:masterClrMapping/>
+  </p:clrMapOvr>
+</p:sld>
+</file>
+
+<file path=ppt/slides/slide12.xml><?xml version="1.0" encoding="utf-8"?>
+<p:sld xmlns:a="http://schemas.openxmlformats.org/drawingml/2006/main" xmlns:r="http://schemas.openxmlformats.org/officeDocument/2006/relationships" xmlns:p="http://schemas.openxmlformats.org/presentationml/2006/main">
+  <p:cSld name="Slide 12">
+    <p:bg>
+      <p:bgPr>
+        <a:solidFill>
+          <a:srgbClr val="FAF7F2"/>
+        </a:solidFill>
+      </p:bgPr>
+    </p:bg>
+    <p:spTree>
+      <p:nvGrpSpPr>
+        <p:cNvPr id="1" name=""/>
+        <p:cNvGrpSpPr/>
+        <p:nvPr/>
+      </p:nvGrpSpPr>
+      <p:grpSpPr>
+        <a:xfrm>
+          <a:off x="0" y="0"/>
+          <a:ext cx="0" cy="0"/>
+          <a:chOff x="0" y="0"/>
+          <a:chExt cx="0" cy="0"/>
+        </a:xfrm>
+      </p:grpSpPr>
+      <p:sp>
+        <p:nvSpPr>
+          <p:cNvPr id="2" name="Text 0"/>
+          <p:cNvSpPr/>
+          <p:nvPr/>
+        </p:nvSpPr>
+        <p:spPr>
+          <a:xfrm>
+            <a:off x="0" y="0"/>
+            <a:ext cx="9144000" cy="101501"/>
+          </a:xfrm>
+          <a:prstGeom prst="rect">
+            <a:avLst/>
+          </a:prstGeom>
+          <a:solidFill>
+            <a:srgbClr val="5D1D2E"/>
+          </a:solidFill>
+          <a:ln/>
+        </p:spPr>
+        <p:txBody>
+          <a:bodyPr wrap="square" rtlCol="0" anchor="ctr"/>
+          <a:lstStyle/>
+          <a:p>
+            <a:pPr indent="0" marL="0">
+              <a:buNone/>
+            </a:pPr>
+            <a:endParaRPr lang="en-US" dirty="0"/>
+          </a:p>
+        </p:txBody>
+      </p:sp>
+      <p:sp>
+        <p:nvSpPr>
+          <p:cNvPr id="3" name="Text 1"/>
+          <p:cNvSpPr/>
+          <p:nvPr/>
+        </p:nvSpPr>
+        <p:spPr>
+          <a:xfrm>
+            <a:off x="406301" y="457051"/>
+            <a:ext cx="8498026" cy="274290"/>
+          </a:xfrm>
+          <a:prstGeom prst="rect">
+            <a:avLst/>
+          </a:prstGeom>
+          <a:noFill/>
+          <a:ln/>
+        </p:spPr>
+        <p:txBody>
+          <a:bodyPr wrap="square" lIns="0" tIns="0" rIns="0" bIns="0" rtlCol="0" anchor="t"/>
+          <a:lstStyle/>
+          <a:p>
+            <a:pPr algn="l" indent="0" marL="0">
+              <a:lnSpc>
+                <a:spcPts val="2160"/>
+              </a:lnSpc>
+              <a:spcBef>
+                <a:spcPts val="600"/>
+              </a:spcBef>
+              <a:spcAft>
+                <a:spcPts val="800"/>
+              </a:spcAft>
+              <a:buNone/>
+            </a:pPr>
+            <a:r>
+              <a:rPr lang="en-US" sz="1800" b="1" dirty="0">
+                <a:solidFill>
+                  <a:srgbClr val="997929"/>
+                </a:solidFill>
+                <a:latin typeface="Times New Roman" pitchFamily="34" charset="0"/>
+                <a:ea typeface="Times New Roman" pitchFamily="34" charset="-122"/>
+                <a:cs typeface="Times New Roman" pitchFamily="34" charset="-120"/>
+              </a:rPr>
+              <a:t>Teacher notes</a:t>
+            </a:r>
+            <a:endParaRPr lang="en-US" sz="1800" dirty="0"/>
+          </a:p>
+        </p:txBody>
+      </p:sp>
+      <p:sp>
+        <p:nvSpPr>
+          <p:cNvPr id="4" name="Text 2"/>
+          <p:cNvSpPr/>
+          <p:nvPr/>
+        </p:nvSpPr>
+        <p:spPr>
+          <a:xfrm>
+            <a:off x="634901" y="883593"/>
+            <a:ext cx="8102798" cy="525661"/>
+          </a:xfrm>
+          <a:prstGeom prst="rect">
+            <a:avLst/>
+          </a:prstGeom>
+          <a:noFill/>
+          <a:ln/>
+        </p:spPr>
+        <p:txBody>
+          <a:bodyPr wrap="square" lIns="0" tIns="0" rIns="0" bIns="0" rtlCol="0" anchor="t"/>
+          <a:lstStyle/>
+          <a:p>
+            <a:pPr algn="l" marL="342900" indent="-342900">
+              <a:lnSpc>
+                <a:spcPts val="1620"/>
+              </a:lnSpc>
+              <a:spcAft>
+                <a:spcPts val="300"/>
+              </a:spcAft>
+              <a:buSzPct val="100000"/>
+              <a:buChar char="•"/>
+            </a:pPr>
+            <a:r>
+              <a:rPr lang="en-US" sz="1200" dirty="0">
+                <a:solidFill>
+                  <a:srgbClr val="1A1A1A"/>
+                </a:solidFill>
+                <a:latin typeface="Georgia" pitchFamily="34" charset="0"/>
+                <a:ea typeface="Georgia" pitchFamily="34" charset="-122"/>
+                <a:cs typeface="Georgia" pitchFamily="34" charset="-120"/>
+              </a:rPr>
+              <a:t>AYUSH ministry is real, contemporary, politically significant. Honour the political reality.</a:t>
+            </a:r>
+            <a:endParaRPr lang="en-US" sz="1200" dirty="0"/>
+          </a:p>
+          <a:p>
+            <a:pPr algn="l" marL="342900" indent="-342900">
+              <a:lnSpc>
+                <a:spcPts val="1620"/>
+              </a:lnSpc>
+              <a:spcAft>
+                <a:spcPts val="300"/>
+              </a:spcAft>
+              <a:buSzPct val="100000"/>
+              <a:buChar char="•"/>
+            </a:pPr>
+            <a:r>
+              <a:rPr lang="en-US" sz="1200" dirty="0">
+                <a:solidFill>
+                  <a:srgbClr val="1A1A1A"/>
+                </a:solidFill>
+                <a:latin typeface="Georgia" pitchFamily="34" charset="0"/>
+                <a:ea typeface="Georgia" pitchFamily="34" charset="-122"/>
+                <a:cs typeface="Georgia" pitchFamily="34" charset="-120"/>
+              </a:rPr>
+              <a:t>Some students from medical families have strong priors. Help them articulate their position rigorously.</a:t>
+            </a:r>
+            <a:endParaRPr lang="en-US" sz="1200" dirty="0"/>
+          </a:p>
+        </p:txBody>
+      </p:sp>
+      <p:sp>
+        <p:nvSpPr>
+          <p:cNvPr id="5" name="Text 3"/>
+          <p:cNvSpPr/>
+          <p:nvPr/>
+        </p:nvSpPr>
+        <p:spPr>
+          <a:xfrm>
+            <a:off x="406301" y="4434929"/>
+            <a:ext cx="8498026" cy="213271"/>
+          </a:xfrm>
+          <a:prstGeom prst="rect">
+            <a:avLst/>
+          </a:prstGeom>
+          <a:noFill/>
+          <a:ln/>
+        </p:spPr>
+        <p:txBody>
+          <a:bodyPr wrap="square" lIns="0" tIns="0" rIns="0" bIns="0" rtlCol="0" anchor="t"/>
+          <a:lstStyle/>
+          <a:p>
+            <a:pPr algn="l" indent="0" marL="0">
+              <a:lnSpc>
+                <a:spcPts val="1680"/>
+              </a:lnSpc>
+              <a:spcBef>
+                <a:spcPts val="300"/>
+              </a:spcBef>
+              <a:spcAft>
+                <a:spcPts val="300"/>
+              </a:spcAft>
+              <a:buNone/>
+            </a:pPr>
+            <a:r>
+              <a:rPr lang="en-US" sz="1200" dirty="0">
+                <a:solidFill>
+                  <a:srgbClr val="1A1A1A"/>
+                </a:solidFill>
+                <a:latin typeface="Georgia" pitchFamily="34" charset="0"/>
+                <a:ea typeface="Georgia" pitchFamily="34" charset="-122"/>
+                <a:cs typeface="Georgia" pitchFamily="34" charset="-120"/>
+              </a:rPr>
+              <a:t>Senior ·  · IKS Curriculum</a:t>
+            </a:r>
+            <a:endParaRPr lang="en-US" sz="1200" dirty="0"/>
+          </a:p>
+        </p:txBody>
+      </p:sp>
+    </p:spTree>
+  </p:cSld>
+  <p:clrMapOvr>
+    <a:masterClrMapping/>
+  </p:clrMapOvr>
+</p:sld>
+</file>
+
+<file path=ppt/slides/slide13.xml><?xml version="1.0" encoding="utf-8"?>
+<p:sld xmlns:a="http://schemas.openxmlformats.org/drawingml/2006/main" xmlns:r="http://schemas.openxmlformats.org/officeDocument/2006/relationships" xmlns:p="http://schemas.openxmlformats.org/presentationml/2006/main">
+  <p:cSld name="Slide 13">
+    <p:bg>
+      <p:bgPr>
+        <a:solidFill>
+          <a:srgbClr val="FAF7F2"/>
+        </a:solidFill>
+      </p:bgPr>
+    </p:bg>
+    <p:spTree>
+      <p:nvGrpSpPr>
+        <p:cNvPr id="1" name=""/>
+        <p:cNvGrpSpPr/>
+        <p:nvPr/>
+      </p:nvGrpSpPr>
+      <p:grpSpPr>
+        <a:xfrm>
+          <a:off x="0" y="0"/>
+          <a:ext cx="0" cy="0"/>
+          <a:chOff x="0" y="0"/>
+          <a:chExt cx="0" cy="0"/>
+        </a:xfrm>
+      </p:grpSpPr>
+      <p:sp>
+        <p:nvSpPr>
+          <p:cNvPr id="2" name="Text 0"/>
+          <p:cNvSpPr/>
+          <p:nvPr/>
+        </p:nvSpPr>
+        <p:spPr>
+          <a:xfrm>
+            <a:off x="0" y="0"/>
+            <a:ext cx="9144000" cy="101501"/>
+          </a:xfrm>
+          <a:prstGeom prst="rect">
+            <a:avLst/>
+          </a:prstGeom>
+          <a:solidFill>
+            <a:srgbClr val="5D1D2E"/>
+          </a:solidFill>
+          <a:ln/>
+        </p:spPr>
+        <p:txBody>
+          <a:bodyPr wrap="square" rtlCol="0" anchor="ctr"/>
+          <a:lstStyle/>
+          <a:p>
+            <a:pPr indent="0" marL="0">
+              <a:buNone/>
+            </a:pPr>
+            <a:endParaRPr lang="en-US" dirty="0"/>
+          </a:p>
+        </p:txBody>
+      </p:sp>
+      <p:sp>
+        <p:nvSpPr>
+          <p:cNvPr id="3" name="Text 1"/>
+          <p:cNvSpPr/>
+          <p:nvPr/>
+        </p:nvSpPr>
+        <p:spPr>
+          <a:xfrm>
+            <a:off x="406301" y="457051"/>
+            <a:ext cx="8498026" cy="274290"/>
+          </a:xfrm>
+          <a:prstGeom prst="rect">
+            <a:avLst/>
+          </a:prstGeom>
+          <a:noFill/>
+          <a:ln/>
+        </p:spPr>
+        <p:txBody>
+          <a:bodyPr wrap="square" lIns="0" tIns="0" rIns="0" bIns="0" rtlCol="0" anchor="t"/>
+          <a:lstStyle/>
+          <a:p>
+            <a:pPr algn="l" indent="0" marL="0">
+              <a:lnSpc>
+                <a:spcPts val="2160"/>
+              </a:lnSpc>
+              <a:spcBef>
+                <a:spcPts val="600"/>
+              </a:spcBef>
+              <a:spcAft>
+                <a:spcPts val="800"/>
+              </a:spcAft>
+              <a:buNone/>
+            </a:pPr>
+            <a:r>
+              <a:rPr lang="en-US" sz="1800" b="1" dirty="0">
+                <a:solidFill>
+                  <a:srgbClr val="997929"/>
+                </a:solidFill>
+                <a:latin typeface="Times New Roman" pitchFamily="34" charset="0"/>
+                <a:ea typeface="Times New Roman" pitchFamily="34" charset="-122"/>
+                <a:cs typeface="Times New Roman" pitchFamily="34" charset="-120"/>
+              </a:rPr>
+              <a:t>Citation(s) used</a:t>
+            </a:r>
+            <a:endParaRPr lang="en-US" sz="1800" dirty="0"/>
+          </a:p>
+        </p:txBody>
+      </p:sp>
+      <p:sp>
+        <p:nvSpPr>
+          <p:cNvPr id="4" name="Text 2"/>
+          <p:cNvSpPr/>
+          <p:nvPr/>
+        </p:nvSpPr>
+        <p:spPr>
+          <a:xfrm>
+            <a:off x="634901" y="883593"/>
+            <a:ext cx="8102798" cy="769441"/>
+          </a:xfrm>
+          <a:prstGeom prst="rect">
+            <a:avLst/>
+          </a:prstGeom>
+          <a:noFill/>
+          <a:ln/>
+        </p:spPr>
+        <p:txBody>
+          <a:bodyPr wrap="square" lIns="0" tIns="0" rIns="0" bIns="0" rtlCol="0" anchor="t"/>
+          <a:lstStyle/>
+          <a:p>
+            <a:pPr algn="l" marL="342900" indent="-342900">
+              <a:lnSpc>
+                <a:spcPts val="1620"/>
+              </a:lnSpc>
+              <a:spcAft>
+                <a:spcPts val="300"/>
+              </a:spcAft>
+              <a:buSzPct val="100000"/>
+              <a:buChar char="•"/>
+            </a:pPr>
+            <a:r>
+              <a:rPr lang="en-US" sz="1200" dirty="0">
+                <a:solidFill>
+                  <a:srgbClr val="1A1A1A"/>
+                </a:solidFill>
+                <a:latin typeface="Georgia" pitchFamily="34" charset="0"/>
+                <a:ea typeface="Georgia" pitchFamily="34" charset="-122"/>
+                <a:cs typeface="Georgia" pitchFamily="34" charset="-120"/>
+              </a:rPr>
+              <a:t>AYUSH Ministry policy documents.</a:t>
+            </a:r>
+            <a:endParaRPr lang="en-US" sz="1200" dirty="0"/>
+          </a:p>
+          <a:p>
+            <a:pPr algn="l" marL="342900" indent="-342900">
+              <a:lnSpc>
+                <a:spcPts val="1620"/>
+              </a:lnSpc>
+              <a:spcAft>
+                <a:spcPts val="300"/>
+              </a:spcAft>
+              <a:buSzPct val="100000"/>
+              <a:buChar char="•"/>
+            </a:pPr>
+            <a:r>
+              <a:rPr lang="en-US" sz="1200" dirty="0">
+                <a:solidFill>
+                  <a:srgbClr val="1A1A1A"/>
+                </a:solidFill>
+                <a:latin typeface="Georgia" pitchFamily="34" charset="0"/>
+                <a:ea typeface="Georgia" pitchFamily="34" charset="-122"/>
+                <a:cs typeface="Georgia" pitchFamily="34" charset="-120"/>
+              </a:rPr>
+              <a:t>Patwardhan et al. (2015).</a:t>
+            </a:r>
+            <a:endParaRPr lang="en-US" sz="1200" dirty="0"/>
+          </a:p>
+          <a:p>
+            <a:pPr algn="l" marL="342900" indent="-342900">
+              <a:lnSpc>
+                <a:spcPts val="1620"/>
+              </a:lnSpc>
+              <a:spcAft>
+                <a:spcPts val="300"/>
+              </a:spcAft>
+              <a:buSzPct val="100000"/>
+              <a:buChar char="•"/>
+            </a:pPr>
+            <a:r>
+              <a:rPr lang="en-US" sz="1200" dirty="0">
+                <a:solidFill>
+                  <a:srgbClr val="1A1A1A"/>
+                </a:solidFill>
+                <a:latin typeface="Georgia" pitchFamily="34" charset="0"/>
+                <a:ea typeface="Georgia" pitchFamily="34" charset="-122"/>
+                <a:cs typeface="Georgia" pitchFamily="34" charset="-120"/>
+              </a:rPr>
+              <a:t>Various IMA statements.</a:t>
             </a:r>
             <a:endParaRPr lang="en-US" sz="1200" dirty="0"/>
           </a:p>
@@ -2617,7 +3283,7 @@
                 <a:ea typeface="Times New Roman" pitchFamily="34" charset="-122"/>
                 <a:cs typeface="Times New Roman" pitchFamily="34" charset="-120"/>
               </a:rPr>
-              <a:t>Materials</a:t>
+              <a:t>Learning objective</a:t>
             </a:r>
             <a:endParaRPr lang="en-US" sz="1800" dirty="0"/>
           </a:p>
@@ -2632,7 +3298,7 @@
         <p:spPr>
           <a:xfrm>
             <a:off x="406301" y="870942"/>
-            <a:ext cx="8498026" cy="213271"/>
+            <a:ext cx="8498026" cy="426541"/>
           </a:xfrm>
           <a:prstGeom prst="rect">
             <a:avLst/>
@@ -2665,7 +3331,7 @@
                 <a:ea typeface="Georgia" pitchFamily="34" charset="-122"/>
                 <a:cs typeface="Georgia" pitchFamily="34" charset="-120"/>
               </a:rPr>
-              <a:t>– Whiteboard – Optional: brief printed extracts on AYUSH ministry policy + Indian Medical Association statements</a:t>
+              <a:t>Students articulate three positions on integrating Ayurveda into modern healthcare and defend one with steel-manned counter-arguments.</a:t>
             </a:r>
             <a:endParaRPr lang="en-US" sz="1200" dirty="0"/>
           </a:p>
@@ -2823,7 +3489,7 @@
                 <a:ea typeface="Times New Roman" pitchFamily="34" charset="-122"/>
                 <a:cs typeface="Times New Roman" pitchFamily="34" charset="-120"/>
               </a:rPr>
-              <a:t>Flow</a:t>
+              <a:t>Materials</a:t>
             </a:r>
             <a:endParaRPr lang="en-US" sz="1800" dirty="0"/>
           </a:p>
@@ -2832,6 +3498,76 @@
       <p:sp>
         <p:nvSpPr>
           <p:cNvPr id="4" name="Text 2"/>
+          <p:cNvSpPr/>
+          <p:nvPr/>
+        </p:nvSpPr>
+        <p:spPr>
+          <a:xfrm>
+            <a:off x="634901" y="883593"/>
+            <a:ext cx="8102798" cy="525661"/>
+          </a:xfrm>
+          <a:prstGeom prst="rect">
+            <a:avLst/>
+          </a:prstGeom>
+          <a:noFill/>
+          <a:ln/>
+        </p:spPr>
+        <p:txBody>
+          <a:bodyPr wrap="square" lIns="0" tIns="0" rIns="0" bIns="0" rtlCol="0" anchor="t"/>
+          <a:lstStyle/>
+          <a:p>
+            <a:pPr algn="l" marL="342900" indent="-342900">
+              <a:lnSpc>
+                <a:spcPts val="1620"/>
+              </a:lnSpc>
+              <a:spcAft>
+                <a:spcPts val="300"/>
+              </a:spcAft>
+              <a:buSzPct val="100000"/>
+              <a:buChar char="•"/>
+            </a:pPr>
+            <a:r>
+              <a:rPr lang="en-US" sz="1200" dirty="0">
+                <a:solidFill>
+                  <a:srgbClr val="1A1A1A"/>
+                </a:solidFill>
+                <a:latin typeface="Georgia" pitchFamily="34" charset="0"/>
+                <a:ea typeface="Georgia" pitchFamily="34" charset="-122"/>
+                <a:cs typeface="Georgia" pitchFamily="34" charset="-120"/>
+              </a:rPr>
+              <a:t>Whiteboard</a:t>
+            </a:r>
+            <a:endParaRPr lang="en-US" sz="1200" dirty="0"/>
+          </a:p>
+          <a:p>
+            <a:pPr algn="l" marL="342900" indent="-342900">
+              <a:lnSpc>
+                <a:spcPts val="1620"/>
+              </a:lnSpc>
+              <a:spcAft>
+                <a:spcPts val="300"/>
+              </a:spcAft>
+              <a:buSzPct val="100000"/>
+              <a:buChar char="•"/>
+            </a:pPr>
+            <a:r>
+              <a:rPr lang="en-US" sz="1200" dirty="0">
+                <a:solidFill>
+                  <a:srgbClr val="1A1A1A"/>
+                </a:solidFill>
+                <a:latin typeface="Georgia" pitchFamily="34" charset="0"/>
+                <a:ea typeface="Georgia" pitchFamily="34" charset="-122"/>
+                <a:cs typeface="Georgia" pitchFamily="34" charset="-120"/>
+              </a:rPr>
+              <a:t>Optional: brief printed extracts on AYUSH ministry policy + Indian Medical Association statements</a:t>
+            </a:r>
+            <a:endParaRPr lang="en-US" sz="1200" dirty="0"/>
+          </a:p>
+        </p:txBody>
+      </p:sp>
+      <p:sp>
+        <p:nvSpPr>
+          <p:cNvPr id="5" name="Text 3"/>
           <p:cNvSpPr/>
           <p:nvPr/>
         </p:nvSpPr>
@@ -2981,7 +3717,7 @@
                 <a:ea typeface="Times New Roman" pitchFamily="34" charset="-122"/>
                 <a:cs typeface="Times New Roman" pitchFamily="34" charset="-120"/>
               </a:rPr>
-              <a:t>Warm-up (3 min)</a:t>
+              <a:t>Flow</a:t>
             </a:r>
             <a:endParaRPr lang="en-US" sz="1800" dirty="0"/>
           </a:p>
@@ -2990,54 +3726,6 @@
       <p:sp>
         <p:nvSpPr>
           <p:cNvPr id="4" name="Text 2"/>
-          <p:cNvSpPr/>
-          <p:nvPr/>
-        </p:nvSpPr>
-        <p:spPr>
-          <a:xfrm>
-            <a:off x="406301" y="870942"/>
-            <a:ext cx="8498026" cy="213271"/>
-          </a:xfrm>
-          <a:prstGeom prst="rect">
-            <a:avLst/>
-          </a:prstGeom>
-          <a:noFill/>
-          <a:ln/>
-        </p:spPr>
-        <p:txBody>
-          <a:bodyPr wrap="square" lIns="0" tIns="0" rIns="0" bIns="0" rtlCol="0" anchor="t"/>
-          <a:lstStyle/>
-          <a:p>
-            <a:pPr algn="l" indent="0" marL="0">
-              <a:lnSpc>
-                <a:spcPts val="1680"/>
-              </a:lnSpc>
-              <a:spcBef>
-                <a:spcPts val="300"/>
-              </a:spcBef>
-              <a:spcAft>
-                <a:spcPts val="300"/>
-              </a:spcAft>
-              <a:buNone/>
-            </a:pPr>
-            <a:r>
-              <a:rPr lang="en-US" sz="1200" dirty="0">
-                <a:solidFill>
-                  <a:srgbClr val="1A1A1A"/>
-                </a:solidFill>
-                <a:latin typeface="Georgia" pitchFamily="34" charset="0"/>
-                <a:ea typeface="Georgia" pitchFamily="34" charset="-122"/>
-                <a:cs typeface="Georgia" pitchFamily="34" charset="-120"/>
-              </a:rPr>
-              <a:t>Brief: today is structured debate. Three positions.</a:t>
-            </a:r>
-            <a:endParaRPr lang="en-US" sz="1200" dirty="0"/>
-          </a:p>
-        </p:txBody>
-      </p:sp>
-      <p:sp>
-        <p:nvSpPr>
-          <p:cNvPr id="5" name="Text 3"/>
           <p:cNvSpPr/>
           <p:nvPr/>
         </p:nvSpPr>
@@ -3187,7 +3875,7 @@
                 <a:ea typeface="Times New Roman" pitchFamily="34" charset="-122"/>
                 <a:cs typeface="Times New Roman" pitchFamily="34" charset="-120"/>
               </a:rPr>
-              <a:t>Three positions (5 min)</a:t>
+              <a:t>Warm-up (3 min)</a:t>
             </a:r>
             <a:endParaRPr lang="en-US" sz="1800" dirty="0"/>
           </a:p>
@@ -3227,7 +3915,7 @@
               <a:buNone/>
             </a:pPr>
             <a:r>
-              <a:rPr lang="en-US" sz="1200" i="1" dirty="0">
+              <a:rPr lang="en-US" sz="1200" dirty="0">
                 <a:solidFill>
                   <a:srgbClr val="1A1A1A"/>
                 </a:solidFill>
@@ -3235,7 +3923,7 @@
                 <a:ea typeface="Georgia" pitchFamily="34" charset="-122"/>
                 <a:cs typeface="Georgia" pitchFamily="34" charset="-120"/>
               </a:rPr>
-              <a:t>Each row: Position · One-line · Defenders.</a:t>
+              <a:t>Brief: today is structured debate. Three positions.</a:t>
             </a:r>
             <a:endParaRPr lang="en-US" sz="1200" dirty="0"/>
           </a:p>
@@ -3244,160 +3932,6 @@
       <p:sp>
         <p:nvSpPr>
           <p:cNvPr id="5" name="Text 3"/>
-          <p:cNvSpPr/>
-          <p:nvPr/>
-        </p:nvSpPr>
-        <p:spPr>
-          <a:xfrm>
-            <a:off x="634901" y="1173063"/>
-            <a:ext cx="8102798" cy="1386483"/>
-          </a:xfrm>
-          <a:prstGeom prst="rect">
-            <a:avLst/>
-          </a:prstGeom>
-          <a:noFill/>
-          <a:ln/>
-        </p:spPr>
-        <p:txBody>
-          <a:bodyPr wrap="square" lIns="0" tIns="0" rIns="0" bIns="0" rtlCol="0" anchor="t"/>
-          <a:lstStyle/>
-          <a:p>
-            <a:pPr algn="l" marL="342900" indent="-342900">
-              <a:lnSpc>
-                <a:spcPts val="1620"/>
-              </a:lnSpc>
-              <a:spcAft>
-                <a:spcPts val="300"/>
-              </a:spcAft>
-              <a:buSzPct val="100000"/>
-              <a:buChar char="•"/>
-            </a:pPr>
-            <a:r>
-              <a:rPr lang="en-US" sz="1200" b="1" dirty="0">
-                <a:solidFill>
-                  <a:srgbClr val="1A1A1A"/>
-                </a:solidFill>
-                <a:latin typeface="Georgia" pitchFamily="34" charset="0"/>
-                <a:ea typeface="Georgia" pitchFamily="34" charset="-122"/>
-                <a:cs typeface="Georgia" pitchFamily="34" charset="-120"/>
-              </a:rPr>
-              <a:t>A — Full integration</a:t>
-            </a:r>
-            <a:pPr algn="l" indent="0" marL="0">
-              <a:lnSpc>
-                <a:spcPts val="1620"/>
-              </a:lnSpc>
-              <a:spcAft>
-                <a:spcPts val="300"/>
-              </a:spcAft>
-              <a:buNone/>
-            </a:pPr>
-            <a:r>
-              <a:rPr lang="en-US" sz="1200" dirty="0">
-                <a:solidFill>
-                  <a:srgbClr val="1A1A1A"/>
-                </a:solidFill>
-                <a:latin typeface="Georgia" pitchFamily="34" charset="0"/>
-                <a:ea typeface="Georgia" pitchFamily="34" charset="-122"/>
-                <a:cs typeface="Georgia" pitchFamily="34" charset="-120"/>
-              </a:rPr>
-              <a:t> — Ayurveda alongside biomedicine; AYUSH practitioners can offer first-line care · AYUSH Ministry; many Indian Ayurveda practitioners</a:t>
-            </a:r>
-            <a:endParaRPr lang="en-US" sz="1200" dirty="0"/>
-          </a:p>
-          <a:p>
-            <a:pPr algn="l" marL="342900" indent="-342900">
-              <a:lnSpc>
-                <a:spcPts val="1620"/>
-              </a:lnSpc>
-              <a:spcAft>
-                <a:spcPts val="300"/>
-              </a:spcAft>
-              <a:buSzPct val="100000"/>
-              <a:buChar char="•"/>
-            </a:pPr>
-            <a:r>
-              <a:rPr lang="en-US" sz="1200" b="1" dirty="0">
-                <a:solidFill>
-                  <a:srgbClr val="1A1A1A"/>
-                </a:solidFill>
-                <a:latin typeface="Georgia" pitchFamily="34" charset="0"/>
-                <a:ea typeface="Georgia" pitchFamily="34" charset="-122"/>
-                <a:cs typeface="Georgia" pitchFamily="34" charset="-120"/>
-              </a:rPr>
-              <a:t>B — Selective integration</a:t>
-            </a:r>
-            <a:pPr algn="l" indent="0" marL="0">
-              <a:lnSpc>
-                <a:spcPts val="1620"/>
-              </a:lnSpc>
-              <a:spcAft>
-                <a:spcPts val="300"/>
-              </a:spcAft>
-              <a:buNone/>
-            </a:pPr>
-            <a:r>
-              <a:rPr lang="en-US" sz="1200" dirty="0">
-                <a:solidFill>
-                  <a:srgbClr val="1A1A1A"/>
-                </a:solidFill>
-                <a:latin typeface="Georgia" pitchFamily="34" charset="0"/>
-                <a:ea typeface="Georgia" pitchFamily="34" charset="-122"/>
-                <a:cs typeface="Georgia" pitchFamily="34" charset="-120"/>
-              </a:rPr>
-              <a:t> — Use Ayurveda where evidence supports; biomedicine where it leads · Patwardhan et al. (2015); evidence-based traditional medicine movement</a:t>
-            </a:r>
-            <a:endParaRPr lang="en-US" sz="1200" dirty="0"/>
-          </a:p>
-          <a:p>
-            <a:pPr algn="l" marL="342900" indent="-342900">
-              <a:lnSpc>
-                <a:spcPts val="1620"/>
-              </a:lnSpc>
-              <a:spcAft>
-                <a:spcPts val="300"/>
-              </a:spcAft>
-              <a:buSzPct val="100000"/>
-              <a:buChar char="•"/>
-            </a:pPr>
-            <a:r>
-              <a:rPr lang="en-US" sz="1200" b="1" dirty="0">
-                <a:solidFill>
-                  <a:srgbClr val="1A1A1A"/>
-                </a:solidFill>
-                <a:latin typeface="Georgia" pitchFamily="34" charset="0"/>
-                <a:ea typeface="Georgia" pitchFamily="34" charset="-122"/>
-                <a:cs typeface="Georgia" pitchFamily="34" charset="-120"/>
-              </a:rPr>
-              <a:t>C — Separation</a:t>
-            </a:r>
-            <a:pPr algn="l" indent="0" marL="0">
-              <a:lnSpc>
-                <a:spcPts val="1620"/>
-              </a:lnSpc>
-              <a:spcAft>
-                <a:spcPts val="300"/>
-              </a:spcAft>
-              <a:buNone/>
-            </a:pPr>
-            <a:r>
-              <a:rPr lang="en-US" sz="1200" dirty="0">
-                <a:solidFill>
-                  <a:srgbClr val="1A1A1A"/>
-                </a:solidFill>
-                <a:latin typeface="Georgia" pitchFamily="34" charset="0"/>
-                <a:ea typeface="Georgia" pitchFamily="34" charset="-122"/>
-                <a:cs typeface="Georgia" pitchFamily="34" charset="-120"/>
-              </a:rPr>
-              <a:t> — Ayurveda as cultural-historical study; biomedicine for actual treatment · Indian Medical Association (some positions); skeptical scientists</a:t>
-            </a:r>
-            <a:endParaRPr lang="en-US" sz="1200" dirty="0"/>
-          </a:p>
-        </p:txBody>
-      </p:sp>
-      <p:sp>
-        <p:nvSpPr>
-          <p:cNvPr id="6" name="Text 4"/>
           <p:cNvSpPr/>
           <p:nvPr/>
         </p:nvSpPr>
@@ -3547,7 +4081,7 @@
                 <a:ea typeface="Times New Roman" pitchFamily="34" charset="-122"/>
                 <a:cs typeface="Times New Roman" pitchFamily="34" charset="-120"/>
               </a:rPr>
-              <a:t>Debate (25 min)</a:t>
+              <a:t>Three positions (5 min)</a:t>
             </a:r>
             <a:endParaRPr lang="en-US" sz="1800" dirty="0"/>
           </a:p>
@@ -3562,7 +4096,7 @@
         <p:spPr>
           <a:xfrm>
             <a:off x="406301" y="870942"/>
-            <a:ext cx="8498026" cy="426541"/>
+            <a:ext cx="8498026" cy="213271"/>
           </a:xfrm>
           <a:prstGeom prst="rect">
             <a:avLst/>
@@ -3587,7 +4121,7 @@
               <a:buNone/>
             </a:pPr>
             <a:r>
-              <a:rPr lang="en-US" sz="1200" dirty="0">
+              <a:rPr lang="en-US" sz="1200" i="1" dirty="0">
                 <a:solidFill>
                   <a:srgbClr val="1A1A1A"/>
                 </a:solidFill>
@@ -3595,7 +4129,7 @@
                 <a:ea typeface="Georgia" pitchFamily="34" charset="-122"/>
                 <a:cs typeface="Georgia" pitchFamily="34" charset="-120"/>
               </a:rPr>
-              <a:t>– 5 min: groups by position. – 10 min: prep — 2 arguments + 1 steel-manned counter to each. – 10 min: structured debate (3 min/group + 1 min cross).</a:t>
+              <a:t>Each row: Position · One-line · Defenders.</a:t>
             </a:r>
             <a:endParaRPr lang="en-US" sz="1200" dirty="0"/>
           </a:p>
@@ -3753,7 +4287,7 @@
                 <a:ea typeface="Times New Roman" pitchFamily="34" charset="-122"/>
                 <a:cs typeface="Times New Roman" pitchFamily="34" charset="-120"/>
               </a:rPr>
-              <a:t>Oral assessment (during)</a:t>
+              <a:t>Three positions (5 min) (cont.)</a:t>
             </a:r>
             <a:endParaRPr lang="en-US" sz="1800" dirty="0"/>
           </a:p>
@@ -3767,8 +4301,8 @@
         </p:nvSpPr>
         <p:spPr>
           <a:xfrm>
-            <a:off x="406301" y="870942"/>
-            <a:ext cx="8498026" cy="213271"/>
+            <a:off x="634901" y="883593"/>
+            <a:ext cx="8102798" cy="1386483"/>
           </a:xfrm>
           <a:prstGeom prst="rect">
             <a:avLst/>
@@ -3780,20 +4314,18 @@
           <a:bodyPr wrap="square" lIns="0" tIns="0" rIns="0" bIns="0" rtlCol="0" anchor="t"/>
           <a:lstStyle/>
           <a:p>
-            <a:pPr algn="l" indent="0" marL="0">
-              <a:lnSpc>
-                <a:spcPts val="1680"/>
-              </a:lnSpc>
-              <a:spcBef>
-                <a:spcPts val="300"/>
-              </a:spcBef>
-              <a:spcAft>
-                <a:spcPts val="300"/>
-              </a:spcAft>
-              <a:buNone/>
-            </a:pPr>
-            <a:r>
-              <a:rPr lang="en-US" sz="1200" dirty="0">
+            <a:pPr algn="l" marL="342900" indent="-342900">
+              <a:lnSpc>
+                <a:spcPts val="1620"/>
+              </a:lnSpc>
+              <a:spcAft>
+                <a:spcPts val="300"/>
+              </a:spcAft>
+              <a:buSzPct val="100000"/>
+              <a:buChar char="•"/>
+            </a:pPr>
+            <a:r>
+              <a:rPr lang="en-US" sz="1200" b="1" dirty="0">
                 <a:solidFill>
                   <a:srgbClr val="1A1A1A"/>
                 </a:solidFill>
@@ -3801,7 +4333,115 @@
                 <a:ea typeface="Georgia" pitchFamily="34" charset="-122"/>
                 <a:cs typeface="Georgia" pitchFamily="34" charset="-120"/>
               </a:rPr>
-              <a:t>Teacher scores 5 random students on: position clarity, evidence use, counter-argument fairness, listening.</a:t>
+              <a:t>A — Full integration</a:t>
+            </a:r>
+            <a:pPr algn="l" indent="0" marL="0">
+              <a:lnSpc>
+                <a:spcPts val="1620"/>
+              </a:lnSpc>
+              <a:spcAft>
+                <a:spcPts val="300"/>
+              </a:spcAft>
+              <a:buNone/>
+            </a:pPr>
+            <a:r>
+              <a:rPr lang="en-US" sz="1200" dirty="0">
+                <a:solidFill>
+                  <a:srgbClr val="1A1A1A"/>
+                </a:solidFill>
+                <a:latin typeface="Georgia" pitchFamily="34" charset="0"/>
+                <a:ea typeface="Georgia" pitchFamily="34" charset="-122"/>
+                <a:cs typeface="Georgia" pitchFamily="34" charset="-120"/>
+              </a:rPr>
+              <a:t> — Ayurveda alongside biomedicine; AYUSH practitioners can offer first-line care · AYUSH Ministry; many Indian Ayurveda practitioners</a:t>
+            </a:r>
+            <a:endParaRPr lang="en-US" sz="1200" dirty="0"/>
+          </a:p>
+          <a:p>
+            <a:pPr algn="l" marL="342900" indent="-342900">
+              <a:lnSpc>
+                <a:spcPts val="1620"/>
+              </a:lnSpc>
+              <a:spcAft>
+                <a:spcPts val="300"/>
+              </a:spcAft>
+              <a:buSzPct val="100000"/>
+              <a:buChar char="•"/>
+            </a:pPr>
+            <a:r>
+              <a:rPr lang="en-US" sz="1200" b="1" dirty="0">
+                <a:solidFill>
+                  <a:srgbClr val="1A1A1A"/>
+                </a:solidFill>
+                <a:latin typeface="Georgia" pitchFamily="34" charset="0"/>
+                <a:ea typeface="Georgia" pitchFamily="34" charset="-122"/>
+                <a:cs typeface="Georgia" pitchFamily="34" charset="-120"/>
+              </a:rPr>
+              <a:t>B — Selective integration</a:t>
+            </a:r>
+            <a:pPr algn="l" indent="0" marL="0">
+              <a:lnSpc>
+                <a:spcPts val="1620"/>
+              </a:lnSpc>
+              <a:spcAft>
+                <a:spcPts val="300"/>
+              </a:spcAft>
+              <a:buNone/>
+            </a:pPr>
+            <a:r>
+              <a:rPr lang="en-US" sz="1200" dirty="0">
+                <a:solidFill>
+                  <a:srgbClr val="1A1A1A"/>
+                </a:solidFill>
+                <a:latin typeface="Georgia" pitchFamily="34" charset="0"/>
+                <a:ea typeface="Georgia" pitchFamily="34" charset="-122"/>
+                <a:cs typeface="Georgia" pitchFamily="34" charset="-120"/>
+              </a:rPr>
+              <a:t> — Use Ayurveda where evidence supports; biomedicine where it leads · Patwardhan et al. (2015); evidence-based traditional medicine movement</a:t>
+            </a:r>
+            <a:endParaRPr lang="en-US" sz="1200" dirty="0"/>
+          </a:p>
+          <a:p>
+            <a:pPr algn="l" marL="342900" indent="-342900">
+              <a:lnSpc>
+                <a:spcPts val="1620"/>
+              </a:lnSpc>
+              <a:spcAft>
+                <a:spcPts val="300"/>
+              </a:spcAft>
+              <a:buSzPct val="100000"/>
+              <a:buChar char="•"/>
+            </a:pPr>
+            <a:r>
+              <a:rPr lang="en-US" sz="1200" b="1" dirty="0">
+                <a:solidFill>
+                  <a:srgbClr val="1A1A1A"/>
+                </a:solidFill>
+                <a:latin typeface="Georgia" pitchFamily="34" charset="0"/>
+                <a:ea typeface="Georgia" pitchFamily="34" charset="-122"/>
+                <a:cs typeface="Georgia" pitchFamily="34" charset="-120"/>
+              </a:rPr>
+              <a:t>C — Separation</a:t>
+            </a:r>
+            <a:pPr algn="l" indent="0" marL="0">
+              <a:lnSpc>
+                <a:spcPts val="1620"/>
+              </a:lnSpc>
+              <a:spcAft>
+                <a:spcPts val="300"/>
+              </a:spcAft>
+              <a:buNone/>
+            </a:pPr>
+            <a:r>
+              <a:rPr lang="en-US" sz="1200" dirty="0">
+                <a:solidFill>
+                  <a:srgbClr val="1A1A1A"/>
+                </a:solidFill>
+                <a:latin typeface="Georgia" pitchFamily="34" charset="0"/>
+                <a:ea typeface="Georgia" pitchFamily="34" charset="-122"/>
+                <a:cs typeface="Georgia" pitchFamily="34" charset="-120"/>
+              </a:rPr>
+              <a:t> — Ayurveda as cultural-historical study; biomedicine for actual treatment · Indian Medical Association (some positions); skeptical scientists</a:t>
             </a:r>
             <a:endParaRPr lang="en-US" sz="1200" dirty="0"/>
           </a:p>
@@ -3959,7 +4599,7 @@
                 <a:ea typeface="Times New Roman" pitchFamily="34" charset="-122"/>
                 <a:cs typeface="Times New Roman" pitchFamily="34" charset="-120"/>
               </a:rPr>
-              <a:t>Wrap-up (12 min)</a:t>
+              <a:t>Debate (25 min)</a:t>
             </a:r>
             <a:endParaRPr lang="en-US" sz="1800" dirty="0"/>
           </a:p>
@@ -3973,8 +4613,8 @@
         </p:nvSpPr>
         <p:spPr>
           <a:xfrm>
-            <a:off x="406301" y="870942"/>
-            <a:ext cx="8498026" cy="426541"/>
+            <a:off x="634901" y="883593"/>
+            <a:ext cx="8102798" cy="769441"/>
           </a:xfrm>
           <a:prstGeom prst="rect">
             <a:avLst/>
@@ -3986,17 +4626,15 @@
           <a:bodyPr wrap="square" lIns="0" tIns="0" rIns="0" bIns="0" rtlCol="0" anchor="t"/>
           <a:lstStyle/>
           <a:p>
-            <a:pPr algn="l" indent="0" marL="0">
-              <a:lnSpc>
-                <a:spcPts val="1680"/>
-              </a:lnSpc>
-              <a:spcBef>
-                <a:spcPts val="300"/>
-              </a:spcBef>
-              <a:spcAft>
-                <a:spcPts val="300"/>
-              </a:spcAft>
-              <a:buNone/>
+            <a:pPr algn="l" marL="342900" indent="-342900">
+              <a:lnSpc>
+                <a:spcPts val="1620"/>
+              </a:lnSpc>
+              <a:spcAft>
+                <a:spcPts val="300"/>
+              </a:spcAft>
+              <a:buSzPct val="100000"/>
+              <a:buChar char="•"/>
             </a:pPr>
             <a:r>
               <a:rPr lang="en-US" sz="1200" dirty="0">
@@ -4007,22 +4645,23 @@
                 <a:ea typeface="Georgia" pitchFamily="34" charset="-122"/>
                 <a:cs typeface="Georgia" pitchFamily="34" charset="-120"/>
               </a:rPr>
-              <a:t>– 3 students share if their view shifted. – Note: </a:t>
-            </a:r>
-            <a:pPr algn="l" indent="0" marL="0">
-              <a:lnSpc>
-                <a:spcPts val="1680"/>
-              </a:lnSpc>
-              <a:spcBef>
-                <a:spcPts val="300"/>
-              </a:spcBef>
-              <a:spcAft>
-                <a:spcPts val="300"/>
-              </a:spcAft>
-              <a:buNone/>
-            </a:pPr>
-            <a:r>
-              <a:rPr lang="en-US" sz="1200" i="1" dirty="0">
+              <a:t>5 min: groups by position.</a:t>
+            </a:r>
+            <a:endParaRPr lang="en-US" sz="1200" dirty="0"/>
+          </a:p>
+          <a:p>
+            <a:pPr algn="l" marL="342900" indent="-342900">
+              <a:lnSpc>
+                <a:spcPts val="1620"/>
+              </a:lnSpc>
+              <a:spcAft>
+                <a:spcPts val="300"/>
+              </a:spcAft>
+              <a:buSzPct val="100000"/>
+              <a:buChar char="•"/>
+            </a:pPr>
+            <a:r>
+              <a:rPr lang="en-US" sz="1200" dirty="0">
                 <a:solidFill>
                   <a:srgbClr val="1A1A1A"/>
                 </a:solidFill>
@@ -4030,7 +4669,31 @@
                 <a:ea typeface="Georgia" pitchFamily="34" charset="-122"/>
                 <a:cs typeface="Georgia" pitchFamily="34" charset="-120"/>
               </a:rPr>
-              <a:t>"This is the most politically loaded session. Both extreme positions have problems. The mature position is somewhere in the middle, defended with evidence."</a:t>
+              <a:t>10 min: prep — 2 arguments + 1 steel-manned counter to each.</a:t>
+            </a:r>
+            <a:endParaRPr lang="en-US" sz="1200" dirty="0"/>
+          </a:p>
+          <a:p>
+            <a:pPr algn="l" marL="342900" indent="-342900">
+              <a:lnSpc>
+                <a:spcPts val="1620"/>
+              </a:lnSpc>
+              <a:spcAft>
+                <a:spcPts val="300"/>
+              </a:spcAft>
+              <a:buSzPct val="100000"/>
+              <a:buChar char="•"/>
+            </a:pPr>
+            <a:r>
+              <a:rPr lang="en-US" sz="1200" dirty="0">
+                <a:solidFill>
+                  <a:srgbClr val="1A1A1A"/>
+                </a:solidFill>
+                <a:latin typeface="Georgia" pitchFamily="34" charset="0"/>
+                <a:ea typeface="Georgia" pitchFamily="34" charset="-122"/>
+                <a:cs typeface="Georgia" pitchFamily="34" charset="-120"/>
+              </a:rPr>
+              <a:t>10 min: structured debate (3 min/group + 1 min cross).</a:t>
             </a:r>
             <a:endParaRPr lang="en-US" sz="1200" dirty="0"/>
           </a:p>
@@ -4188,7 +4851,7 @@
                 <a:ea typeface="Times New Roman" pitchFamily="34" charset="-122"/>
                 <a:cs typeface="Times New Roman" pitchFamily="34" charset="-120"/>
               </a:rPr>
-              <a:t>Differentiation</a:t>
+              <a:t>Oral assessment (during)</a:t>
             </a:r>
             <a:endParaRPr lang="en-US" sz="1800" dirty="0"/>
           </a:p>
@@ -4202,8 +4865,8 @@
         </p:nvSpPr>
         <p:spPr>
           <a:xfrm>
-            <a:off x="634901" y="883593"/>
-            <a:ext cx="8102798" cy="525661"/>
+            <a:off x="406301" y="870942"/>
+            <a:ext cx="8498026" cy="213271"/>
           </a:xfrm>
           <a:prstGeom prst="rect">
             <a:avLst/>
@@ -4215,18 +4878,20 @@
           <a:bodyPr wrap="square" lIns="0" tIns="0" rIns="0" bIns="0" rtlCol="0" anchor="t"/>
           <a:lstStyle/>
           <a:p>
-            <a:pPr algn="l" marL="342900" indent="-342900">
-              <a:lnSpc>
-                <a:spcPts val="1620"/>
-              </a:lnSpc>
-              <a:spcAft>
-                <a:spcPts val="300"/>
-              </a:spcAft>
-              <a:buSzPct val="100000"/>
-              <a:buChar char="•"/>
-            </a:pPr>
-            <a:r>
-              <a:rPr lang="en-US" sz="1200" b="1" dirty="0">
+            <a:pPr algn="l" indent="0" marL="0">
+              <a:lnSpc>
+                <a:spcPts val="1680"/>
+              </a:lnSpc>
+              <a:spcBef>
+                <a:spcPts val="300"/>
+              </a:spcBef>
+              <a:spcAft>
+                <a:spcPts val="300"/>
+              </a:spcAft>
+              <a:buNone/>
+            </a:pPr>
+            <a:r>
+              <a:rPr lang="en-US" sz="1200" dirty="0">
                 <a:solidFill>
                   <a:srgbClr val="1A1A1A"/>
                 </a:solidFill>
@@ -4234,71 +4899,7 @@
                 <a:ea typeface="Georgia" pitchFamily="34" charset="-122"/>
                 <a:cs typeface="Georgia" pitchFamily="34" charset="-120"/>
               </a:rPr>
-              <a:t>Tier up:</a:t>
-            </a:r>
-            <a:pPr algn="l" indent="0" marL="0">
-              <a:lnSpc>
-                <a:spcPts val="1620"/>
-              </a:lnSpc>
-              <a:spcAft>
-                <a:spcPts val="300"/>
-              </a:spcAft>
-              <a:buNone/>
-            </a:pPr>
-            <a:r>
-              <a:rPr lang="en-US" sz="1200" dirty="0">
-                <a:solidFill>
-                  <a:srgbClr val="1A1A1A"/>
-                </a:solidFill>
-                <a:latin typeface="Georgia" pitchFamily="34" charset="0"/>
-                <a:ea typeface="Georgia" pitchFamily="34" charset="-122"/>
-                <a:cs typeface="Georgia" pitchFamily="34" charset="-120"/>
-              </a:rPr>
-              <a:t> Take position you disagree with.</a:t>
-            </a:r>
-            <a:endParaRPr lang="en-US" sz="1200" dirty="0"/>
-          </a:p>
-          <a:p>
-            <a:pPr algn="l" marL="342900" indent="-342900">
-              <a:lnSpc>
-                <a:spcPts val="1620"/>
-              </a:lnSpc>
-              <a:spcAft>
-                <a:spcPts val="300"/>
-              </a:spcAft>
-              <a:buSzPct val="100000"/>
-              <a:buChar char="•"/>
-            </a:pPr>
-            <a:r>
-              <a:rPr lang="en-US" sz="1200" b="1" dirty="0">
-                <a:solidFill>
-                  <a:srgbClr val="1A1A1A"/>
-                </a:solidFill>
-                <a:latin typeface="Georgia" pitchFamily="34" charset="0"/>
-                <a:ea typeface="Georgia" pitchFamily="34" charset="-122"/>
-                <a:cs typeface="Georgia" pitchFamily="34" charset="-120"/>
-              </a:rPr>
-              <a:t>Tier down:</a:t>
-            </a:r>
-            <a:pPr algn="l" indent="0" marL="0">
-              <a:lnSpc>
-                <a:spcPts val="1620"/>
-              </a:lnSpc>
-              <a:spcAft>
-                <a:spcPts val="300"/>
-              </a:spcAft>
-              <a:buNone/>
-            </a:pPr>
-            <a:r>
-              <a:rPr lang="en-US" sz="1200" dirty="0">
-                <a:solidFill>
-                  <a:srgbClr val="1A1A1A"/>
-                </a:solidFill>
-                <a:latin typeface="Georgia" pitchFamily="34" charset="0"/>
-                <a:ea typeface="Georgia" pitchFamily="34" charset="-122"/>
-                <a:cs typeface="Georgia" pitchFamily="34" charset="-120"/>
-              </a:rPr>
-              <a:t> Use prepared 2-min argument.</a:t>
+              <a:t>Teacher scores 5 random students on: position clarity, evidence use, counter-argument fairness, listening.</a:t>
             </a:r>
             <a:endParaRPr lang="en-US" sz="1200" dirty="0"/>
           </a:p>
